--- a/docs/Презентация ВКР Курбатов Д.Е.pptx
+++ b/docs/Презентация ВКР Курбатов Д.Е.pptx
@@ -3341,6 +3341,22 @@
             </a:pPr>
             <a:r>
               <a:t>Репозиторий: github.com/Dmitrii9898/noc-portal</a:t>
+            </a:r>
+          </a:p>
+          <a:p>
+            <a:pPr algn="l">
+              <a:spcAft>
+                <a:spcPts val="1000"/>
+              </a:spcAft>
+              <a:defRPr sz="2000">
+                <a:solidFill>
+                  <a:srgbClr val="F4F7F4"/>
+                </a:solidFill>
+                <a:latin typeface="Calibri"/>
+              </a:defRPr>
+            </a:pPr>
+            <a:r>
+              <a:t>Сайт: nocportal.onrender.com</a:t>
             </a:r>
           </a:p>
           <a:p>
